--- a/output/week14/Week14_Presentation_BICT3202_OOAD.pptx
+++ b/output/week14/Week14_Presentation_BICT3202_OOAD.pptx
@@ -3704,7 +3704,7 @@
                 </a:solidFill>
                 <a:latin typeface="Poppins"/>
               </a:rPr>
-              <a:t>Analysis Class → Design Class</a:t>
+              <a:t>Analysis Class -&gt; Design Class</a:t>
             </a:r>
           </a:p>
         </p:txBody>
@@ -5077,7 +5077,7 @@
                 </a:solidFill>
                 <a:latin typeface="Poppins"/>
               </a:rPr>
-              <a:t>Sequence Diagram → Class Design</a:t>
+              <a:t>Sequence Diagram -&gt; Class Design</a:t>
             </a:r>
           </a:p>
         </p:txBody>
@@ -5301,7 +5301,7 @@
                 </a:solidFill>
                 <a:latin typeface="Open Sans"/>
               </a:rPr>
-              <a:t>Course → checkCapacity() means Course needs checkCapacity().</a:t>
+              <a:t>Course -&gt; checkCapacity() means Course needs checkCapacity().</a:t>
             </a:r>
           </a:p>
         </p:txBody>
@@ -6143,7 +6143,7 @@
                 </a:solidFill>
                 <a:latin typeface="Open Sans"/>
               </a:rPr>
-              <a:t>registerStudent() causes Available → Full at the final seat.</a:t>
+              <a:t>registerStudent() causes Available -&gt; Full at the final seat.</a:t>
             </a:r>
           </a:p>
         </p:txBody>
@@ -7827,7 +7827,7 @@
                 </a:solidFill>
                 <a:latin typeface="Open Sans"/>
               </a:rPr>
-              <a:t>RegistrationService → PaymentGateway, not → AirtelMoneyAPI.</a:t>
+              <a:t>RegistrationService -&gt; PaymentGateway, not -&gt; AirtelMoneyAPI.</a:t>
             </a:r>
           </a:p>
         </p:txBody>
@@ -9163,7 +9163,7 @@
                 </a:solidFill>
                 <a:latin typeface="Open Sans"/>
               </a:rPr>
-              <a:t>Controller → Service → Domain → Repository</a:t>
+              <a:t>Controller -&gt; Service -&gt; Domain -&gt; Repository</a:t>
             </a:r>
           </a:p>
         </p:txBody>
@@ -10932,7 +10932,7 @@
                 </a:solidFill>
                 <a:latin typeface="Open Sans"/>
               </a:rPr>
-              <a:t>Requirement → use case → scenario → sequence → classes → responsibilities → design → implementation.</a:t>
+              <a:t>Requirement -&gt; use case -&gt; scenario -&gt; sequence -&gt; classes -&gt; responsibilities -&gt; design -&gt; implementation.</a:t>
             </a:r>
           </a:p>
           <a:p>
@@ -10969,7 +10969,7 @@
                 </a:solidFill>
                 <a:latin typeface="Open Sans"/>
               </a:rPr>
-              <a:t>Class model ↔ dynamic model ↔ behavioural model.</a:t>
+              <a:t>Class model &lt;- dynamic model &lt;- behavioural model.</a:t>
             </a:r>
           </a:p>
           <a:p>
@@ -11571,7 +11571,7 @@
                 </a:solidFill>
                 <a:latin typeface="Poppins"/>
               </a:rPr>
-              <a:t>Week 13 → Week 14</a:t>
+              <a:t>Week 13 -&gt; Week 14</a:t>
             </a:r>
           </a:p>
         </p:txBody>
@@ -12413,7 +12413,7 @@
                 </a:solidFill>
                 <a:latin typeface="Poppins"/>
               </a:rPr>
-              <a:t>Analysis Model → Design Model</a:t>
+              <a:t>Analysis Model -&gt; Design Model</a:t>
             </a:r>
           </a:p>
         </p:txBody>
@@ -12637,7 +12637,7 @@
                 </a:solidFill>
                 <a:latin typeface="Open Sans"/>
               </a:rPr>
-              <a:t>Requirements → use cases → analysis → design decisions → design → implementation.</a:t>
+              <a:t>Requirements -&gt; use cases -&gt; analysis -&gt; design decisions -&gt; design -&gt; implementation.</a:t>
             </a:r>
           </a:p>
         </p:txBody>
